--- a/PortalX final ppt.pptx
+++ b/PortalX final ppt.pptx
@@ -2257,7 +2257,7 @@
         </p:nvSpPr>
         <p:spPr>
           <a:xfrm>
-            <a:off x="548640" y="1188720"/>
+            <a:off x="548640" y="1306287"/>
             <a:ext cx="4937760" cy="365760"/>
           </a:xfrm>
           <a:prstGeom prst="rect">
@@ -2296,7 +2296,7 @@
         </p:nvSpPr>
         <p:spPr>
           <a:xfrm>
-            <a:off x="548640" y="1691640"/>
+            <a:off x="548640" y="1809207"/>
             <a:ext cx="5120640" cy="2743200"/>
           </a:xfrm>
           <a:prstGeom prst="rect">
@@ -2402,7 +2402,7 @@
         </p:nvSpPr>
         <p:spPr>
           <a:xfrm>
-            <a:off x="6126480" y="1188720"/>
+            <a:off x="6126480" y="1306287"/>
             <a:ext cx="4937760" cy="365760"/>
           </a:xfrm>
           <a:prstGeom prst="rect">
@@ -2441,7 +2441,7 @@
         </p:nvSpPr>
         <p:spPr>
           <a:xfrm>
-            <a:off x="6126480" y="1691640"/>
+            <a:off x="6126480" y="1809207"/>
             <a:ext cx="4937760" cy="2743200"/>
           </a:xfrm>
           <a:prstGeom prst="rect">
